--- a/4ис/практика 4.pptx
+++ b/4ис/практика 4.pptx
@@ -6,12 +6,12 @@
   </p:sldMasterIdLst>
   <p:sldIdLst>
     <p:sldId id="256" r:id="rId2"/>
-    <p:sldId id="262" r:id="rId3"/>
+    <p:sldId id="263" r:id="rId3"/>
     <p:sldId id="257" r:id="rId4"/>
-    <p:sldId id="259" r:id="rId5"/>
-    <p:sldId id="260" r:id="rId6"/>
-    <p:sldId id="258" r:id="rId7"/>
-    <p:sldId id="261" r:id="rId8"/>
+    <p:sldId id="258" r:id="rId5"/>
+    <p:sldId id="259" r:id="rId6"/>
+    <p:sldId id="260" r:id="rId7"/>
+    <p:sldId id="262" r:id="rId8"/>
   </p:sldIdLst>
   <p:sldSz cx="9144000" cy="6858000" type="screen4x3"/>
   <p:notesSz cx="6858000" cy="9144000"/>
@@ -292,10 +292,10 @@
           <a:bodyPr/>
           <a:lstStyle/>
           <a:p>
-            <a:fld id="{E1AAB751-8214-4DCA-A67E-1243E59E7911}" type="datetimeFigureOut">
+            <a:fld id="{1380692E-2DF2-4160-8FCC-EE817E0C47E2}" type="datetimeFigureOut">
               <a:rPr lang="ru-RU" smtClean="0"/>
               <a:pPr/>
-              <a:t>03.04.2026</a:t>
+              <a:t>06.04.2026</a:t>
             </a:fld>
             <a:endParaRPr lang="ru-RU"/>
           </a:p>
@@ -335,7 +335,7 @@
           <a:bodyPr/>
           <a:lstStyle/>
           <a:p>
-            <a:fld id="{15517A53-1DE9-4820-81FB-20B4CABC57B7}" type="slidenum">
+            <a:fld id="{0E360240-E8AC-4F10-98FB-DE1E40CAF290}" type="slidenum">
               <a:rPr lang="ru-RU" smtClean="0"/>
               <a:pPr/>
               <a:t>‹#›</a:t>
@@ -459,10 +459,10 @@
           <a:bodyPr/>
           <a:lstStyle/>
           <a:p>
-            <a:fld id="{E1AAB751-8214-4DCA-A67E-1243E59E7911}" type="datetimeFigureOut">
+            <a:fld id="{1380692E-2DF2-4160-8FCC-EE817E0C47E2}" type="datetimeFigureOut">
               <a:rPr lang="ru-RU" smtClean="0"/>
               <a:pPr/>
-              <a:t>03.04.2026</a:t>
+              <a:t>06.04.2026</a:t>
             </a:fld>
             <a:endParaRPr lang="ru-RU"/>
           </a:p>
@@ -502,7 +502,7 @@
           <a:bodyPr/>
           <a:lstStyle/>
           <a:p>
-            <a:fld id="{15517A53-1DE9-4820-81FB-20B4CABC57B7}" type="slidenum">
+            <a:fld id="{0E360240-E8AC-4F10-98FB-DE1E40CAF290}" type="slidenum">
               <a:rPr lang="ru-RU" smtClean="0"/>
               <a:pPr/>
               <a:t>‹#›</a:t>
@@ -636,10 +636,10 @@
           <a:bodyPr/>
           <a:lstStyle/>
           <a:p>
-            <a:fld id="{E1AAB751-8214-4DCA-A67E-1243E59E7911}" type="datetimeFigureOut">
+            <a:fld id="{1380692E-2DF2-4160-8FCC-EE817E0C47E2}" type="datetimeFigureOut">
               <a:rPr lang="ru-RU" smtClean="0"/>
               <a:pPr/>
-              <a:t>03.04.2026</a:t>
+              <a:t>06.04.2026</a:t>
             </a:fld>
             <a:endParaRPr lang="ru-RU"/>
           </a:p>
@@ -679,7 +679,7 @@
           <a:bodyPr/>
           <a:lstStyle/>
           <a:p>
-            <a:fld id="{15517A53-1DE9-4820-81FB-20B4CABC57B7}" type="slidenum">
+            <a:fld id="{0E360240-E8AC-4F10-98FB-DE1E40CAF290}" type="slidenum">
               <a:rPr lang="ru-RU" smtClean="0"/>
               <a:pPr/>
               <a:t>‹#›</a:t>
@@ -803,10 +803,10 @@
           <a:bodyPr/>
           <a:lstStyle/>
           <a:p>
-            <a:fld id="{E1AAB751-8214-4DCA-A67E-1243E59E7911}" type="datetimeFigureOut">
+            <a:fld id="{1380692E-2DF2-4160-8FCC-EE817E0C47E2}" type="datetimeFigureOut">
               <a:rPr lang="ru-RU" smtClean="0"/>
               <a:pPr/>
-              <a:t>03.04.2026</a:t>
+              <a:t>06.04.2026</a:t>
             </a:fld>
             <a:endParaRPr lang="ru-RU"/>
           </a:p>
@@ -846,7 +846,7 @@
           <a:bodyPr/>
           <a:lstStyle/>
           <a:p>
-            <a:fld id="{15517A53-1DE9-4820-81FB-20B4CABC57B7}" type="slidenum">
+            <a:fld id="{0E360240-E8AC-4F10-98FB-DE1E40CAF290}" type="slidenum">
               <a:rPr lang="ru-RU" smtClean="0"/>
               <a:pPr/>
               <a:t>‹#›</a:t>
@@ -1046,10 +1046,10 @@
           <a:bodyPr/>
           <a:lstStyle/>
           <a:p>
-            <a:fld id="{E1AAB751-8214-4DCA-A67E-1243E59E7911}" type="datetimeFigureOut">
+            <a:fld id="{1380692E-2DF2-4160-8FCC-EE817E0C47E2}" type="datetimeFigureOut">
               <a:rPr lang="ru-RU" smtClean="0"/>
               <a:pPr/>
-              <a:t>03.04.2026</a:t>
+              <a:t>06.04.2026</a:t>
             </a:fld>
             <a:endParaRPr lang="ru-RU"/>
           </a:p>
@@ -1089,7 +1089,7 @@
           <a:bodyPr/>
           <a:lstStyle/>
           <a:p>
-            <a:fld id="{15517A53-1DE9-4820-81FB-20B4CABC57B7}" type="slidenum">
+            <a:fld id="{0E360240-E8AC-4F10-98FB-DE1E40CAF290}" type="slidenum">
               <a:rPr lang="ru-RU" smtClean="0"/>
               <a:pPr/>
               <a:t>‹#›</a:t>
@@ -1331,10 +1331,10 @@
           <a:bodyPr/>
           <a:lstStyle/>
           <a:p>
-            <a:fld id="{E1AAB751-8214-4DCA-A67E-1243E59E7911}" type="datetimeFigureOut">
+            <a:fld id="{1380692E-2DF2-4160-8FCC-EE817E0C47E2}" type="datetimeFigureOut">
               <a:rPr lang="ru-RU" smtClean="0"/>
               <a:pPr/>
-              <a:t>03.04.2026</a:t>
+              <a:t>06.04.2026</a:t>
             </a:fld>
             <a:endParaRPr lang="ru-RU"/>
           </a:p>
@@ -1374,7 +1374,7 @@
           <a:bodyPr/>
           <a:lstStyle/>
           <a:p>
-            <a:fld id="{15517A53-1DE9-4820-81FB-20B4CABC57B7}" type="slidenum">
+            <a:fld id="{0E360240-E8AC-4F10-98FB-DE1E40CAF290}" type="slidenum">
               <a:rPr lang="ru-RU" smtClean="0"/>
               <a:pPr/>
               <a:t>‹#›</a:t>
@@ -1750,10 +1750,10 @@
           <a:bodyPr/>
           <a:lstStyle/>
           <a:p>
-            <a:fld id="{E1AAB751-8214-4DCA-A67E-1243E59E7911}" type="datetimeFigureOut">
+            <a:fld id="{1380692E-2DF2-4160-8FCC-EE817E0C47E2}" type="datetimeFigureOut">
               <a:rPr lang="ru-RU" smtClean="0"/>
               <a:pPr/>
-              <a:t>03.04.2026</a:t>
+              <a:t>06.04.2026</a:t>
             </a:fld>
             <a:endParaRPr lang="ru-RU"/>
           </a:p>
@@ -1793,7 +1793,7 @@
           <a:bodyPr/>
           <a:lstStyle/>
           <a:p>
-            <a:fld id="{15517A53-1DE9-4820-81FB-20B4CABC57B7}" type="slidenum">
+            <a:fld id="{0E360240-E8AC-4F10-98FB-DE1E40CAF290}" type="slidenum">
               <a:rPr lang="ru-RU" smtClean="0"/>
               <a:pPr/>
               <a:t>‹#›</a:t>
@@ -1865,10 +1865,10 @@
           <a:bodyPr/>
           <a:lstStyle/>
           <a:p>
-            <a:fld id="{E1AAB751-8214-4DCA-A67E-1243E59E7911}" type="datetimeFigureOut">
+            <a:fld id="{1380692E-2DF2-4160-8FCC-EE817E0C47E2}" type="datetimeFigureOut">
               <a:rPr lang="ru-RU" smtClean="0"/>
               <a:pPr/>
-              <a:t>03.04.2026</a:t>
+              <a:t>06.04.2026</a:t>
             </a:fld>
             <a:endParaRPr lang="ru-RU"/>
           </a:p>
@@ -1908,7 +1908,7 @@
           <a:bodyPr/>
           <a:lstStyle/>
           <a:p>
-            <a:fld id="{15517A53-1DE9-4820-81FB-20B4CABC57B7}" type="slidenum">
+            <a:fld id="{0E360240-E8AC-4F10-98FB-DE1E40CAF290}" type="slidenum">
               <a:rPr lang="ru-RU" smtClean="0"/>
               <a:pPr/>
               <a:t>‹#›</a:t>
@@ -1957,10 +1957,10 @@
           <a:bodyPr/>
           <a:lstStyle/>
           <a:p>
-            <a:fld id="{E1AAB751-8214-4DCA-A67E-1243E59E7911}" type="datetimeFigureOut">
+            <a:fld id="{1380692E-2DF2-4160-8FCC-EE817E0C47E2}" type="datetimeFigureOut">
               <a:rPr lang="ru-RU" smtClean="0"/>
               <a:pPr/>
-              <a:t>03.04.2026</a:t>
+              <a:t>06.04.2026</a:t>
             </a:fld>
             <a:endParaRPr lang="ru-RU"/>
           </a:p>
@@ -2000,7 +2000,7 @@
           <a:bodyPr/>
           <a:lstStyle/>
           <a:p>
-            <a:fld id="{15517A53-1DE9-4820-81FB-20B4CABC57B7}" type="slidenum">
+            <a:fld id="{0E360240-E8AC-4F10-98FB-DE1E40CAF290}" type="slidenum">
               <a:rPr lang="ru-RU" smtClean="0"/>
               <a:pPr/>
               <a:t>‹#›</a:t>
@@ -2231,10 +2231,10 @@
           <a:bodyPr/>
           <a:lstStyle/>
           <a:p>
-            <a:fld id="{E1AAB751-8214-4DCA-A67E-1243E59E7911}" type="datetimeFigureOut">
+            <a:fld id="{1380692E-2DF2-4160-8FCC-EE817E0C47E2}" type="datetimeFigureOut">
               <a:rPr lang="ru-RU" smtClean="0"/>
               <a:pPr/>
-              <a:t>03.04.2026</a:t>
+              <a:t>06.04.2026</a:t>
             </a:fld>
             <a:endParaRPr lang="ru-RU"/>
           </a:p>
@@ -2274,7 +2274,7 @@
           <a:bodyPr/>
           <a:lstStyle/>
           <a:p>
-            <a:fld id="{15517A53-1DE9-4820-81FB-20B4CABC57B7}" type="slidenum">
+            <a:fld id="{0E360240-E8AC-4F10-98FB-DE1E40CAF290}" type="slidenum">
               <a:rPr lang="ru-RU" smtClean="0"/>
               <a:pPr/>
               <a:t>‹#›</a:t>
@@ -2481,10 +2481,10 @@
           <a:bodyPr/>
           <a:lstStyle/>
           <a:p>
-            <a:fld id="{E1AAB751-8214-4DCA-A67E-1243E59E7911}" type="datetimeFigureOut">
+            <a:fld id="{1380692E-2DF2-4160-8FCC-EE817E0C47E2}" type="datetimeFigureOut">
               <a:rPr lang="ru-RU" smtClean="0"/>
               <a:pPr/>
-              <a:t>03.04.2026</a:t>
+              <a:t>06.04.2026</a:t>
             </a:fld>
             <a:endParaRPr lang="ru-RU"/>
           </a:p>
@@ -2524,7 +2524,7 @@
           <a:bodyPr/>
           <a:lstStyle/>
           <a:p>
-            <a:fld id="{15517A53-1DE9-4820-81FB-20B4CABC57B7}" type="slidenum">
+            <a:fld id="{0E360240-E8AC-4F10-98FB-DE1E40CAF290}" type="slidenum">
               <a:rPr lang="ru-RU" smtClean="0"/>
               <a:pPr/>
               <a:t>‹#›</a:t>
@@ -2691,10 +2691,10 @@
             </a:lvl1pPr>
           </a:lstStyle>
           <a:p>
-            <a:fld id="{E1AAB751-8214-4DCA-A67E-1243E59E7911}" type="datetimeFigureOut">
+            <a:fld id="{1380692E-2DF2-4160-8FCC-EE817E0C47E2}" type="datetimeFigureOut">
               <a:rPr lang="ru-RU" smtClean="0"/>
               <a:pPr/>
-              <a:t>03.04.2026</a:t>
+              <a:t>06.04.2026</a:t>
             </a:fld>
             <a:endParaRPr lang="ru-RU"/>
           </a:p>
@@ -2770,7 +2770,7 @@
             </a:lvl1pPr>
           </a:lstStyle>
           <a:p>
-            <a:fld id="{15517A53-1DE9-4820-81FB-20B4CABC57B7}" type="slidenum">
+            <a:fld id="{0E360240-E8AC-4F10-98FB-DE1E40CAF290}" type="slidenum">
               <a:rPr lang="ru-RU" smtClean="0"/>
               <a:pPr/>
               <a:t>‹#›</a:t>
@@ -3082,15 +3082,7 @@
           <a:p>
             <a:r>
               <a:rPr lang="ru-RU" dirty="0" smtClean="0"/>
-              <a:t>Регистры накоплений</a:t>
-            </a:r>
-            <a:r>
-              <a:rPr lang="en-US" dirty="0" smtClean="0"/>
-              <a:t>: </a:t>
-            </a:r>
-            <a:r>
-              <a:rPr lang="ru-RU" dirty="0" smtClean="0"/>
-              <a:t>остатки</a:t>
+              <a:t>Документы: структура, форма, логика проведения</a:t>
             </a:r>
             <a:endParaRPr lang="ru-RU" dirty="0"/>
           </a:p>
@@ -3133,7 +3125,7 @@
         </p:nvSpPr>
         <p:spPr>
           <a:xfrm>
-            <a:off x="457200" y="-285776"/>
+            <a:off x="457200" y="-24"/>
             <a:ext cx="8229600" cy="1143000"/>
           </a:xfrm>
         </p:spPr>
@@ -3157,8 +3149,8 @@
         </p:nvSpPr>
         <p:spPr>
           <a:xfrm>
-            <a:off x="0" y="1500174"/>
-            <a:ext cx="9144000" cy="2677656"/>
+            <a:off x="0" y="1000108"/>
+            <a:ext cx="9144000" cy="3539430"/>
           </a:xfrm>
           <a:prstGeom prst="rect">
             <a:avLst/>
@@ -3172,33 +3164,25 @@
           <a:p>
             <a:pPr algn="just"/>
             <a:r>
-              <a:rPr lang="ru-RU" sz="2400" dirty="0" smtClean="0">
-                <a:latin typeface="Times New Roman" pitchFamily="18" charset="0"/>
-                <a:cs typeface="Times New Roman" pitchFamily="18" charset="0"/>
-              </a:rPr>
-              <a:t>Регистр накопления</a:t>
+              <a:rPr lang="ru-RU" sz="3200" b="1" dirty="0" smtClean="0">
+                <a:latin typeface="Times New Roman" pitchFamily="18" charset="0"/>
+                <a:cs typeface="Times New Roman" pitchFamily="18" charset="0"/>
+              </a:rPr>
+              <a:t>Документы</a:t>
             </a:r>
           </a:p>
           <a:p>
             <a:pPr algn="just"/>
             <a:r>
-              <a:rPr lang="en-US" sz="2400" dirty="0" smtClean="0">
+              <a:rPr lang="en-US" sz="3200" dirty="0" smtClean="0">
                 <a:latin typeface="Times New Roman" pitchFamily="18" charset="0"/>
                 <a:cs typeface="Times New Roman" pitchFamily="18" charset="0"/>
                 <a:hlinkClick r:id="rId2"/>
               </a:rPr>
-              <a:t>https://v8.1c.ru/platforma/registr-nakopleniya</a:t>
-            </a:r>
-            <a:r>
-              <a:rPr lang="en-US" sz="2400" dirty="0" smtClean="0">
-                <a:latin typeface="Times New Roman" pitchFamily="18" charset="0"/>
-                <a:cs typeface="Times New Roman" pitchFamily="18" charset="0"/>
-                <a:hlinkClick r:id="rId2"/>
-              </a:rPr>
-              <a:t>/</a:t>
-            </a:r>
-            <a:r>
-              <a:rPr lang="en-US" sz="2400" dirty="0" smtClean="0">
+              <a:t>https://v8.1c.ru/platforma/dokumenty/</a:t>
+            </a:r>
+            <a:r>
+              <a:rPr lang="en-US" sz="3200" dirty="0" smtClean="0">
                 <a:latin typeface="Times New Roman" pitchFamily="18" charset="0"/>
                 <a:cs typeface="Times New Roman" pitchFamily="18" charset="0"/>
               </a:rPr>
@@ -3207,88 +3191,39 @@
           </a:p>
           <a:p>
             <a:pPr algn="just"/>
-            <a:r>
-              <a:rPr lang="en-US" sz="2400" dirty="0" smtClean="0">
-                <a:latin typeface="Times New Roman" pitchFamily="18" charset="0"/>
-                <a:cs typeface="Times New Roman" pitchFamily="18" charset="0"/>
-                <a:hlinkClick r:id="rId3"/>
-              </a:rPr>
-              <a:t>http://</a:t>
-            </a:r>
-            <a:r>
-              <a:rPr lang="en-US" sz="2400" dirty="0" smtClean="0">
-                <a:latin typeface="Times New Roman" pitchFamily="18" charset="0"/>
-                <a:cs typeface="Times New Roman" pitchFamily="18" charset="0"/>
-                <a:hlinkClick r:id="rId3"/>
-              </a:rPr>
-              <a:t>bondarenko.gelema.ru/ITPRIS/Praktika6.pdf</a:t>
-            </a:r>
-            <a:endParaRPr lang="en-US" sz="2400" dirty="0" smtClean="0">
+            <a:endParaRPr lang="en-US" sz="3200" dirty="0">
               <a:latin typeface="Times New Roman" pitchFamily="18" charset="0"/>
               <a:cs typeface="Times New Roman" pitchFamily="18" charset="0"/>
             </a:endParaRPr>
           </a:p>
           <a:p>
             <a:pPr algn="just"/>
-            <a:endParaRPr lang="en-US" sz="2400" dirty="0" smtClean="0">
+            <a:r>
+              <a:rPr lang="ru-RU" sz="3200" b="1" dirty="0" smtClean="0">
+                <a:latin typeface="Times New Roman" pitchFamily="18" charset="0"/>
+                <a:cs typeface="Times New Roman" pitchFamily="18" charset="0"/>
+              </a:rPr>
+              <a:t>Проведение документов</a:t>
+            </a:r>
+          </a:p>
+          <a:p>
+            <a:pPr algn="just"/>
+            <a:r>
+              <a:rPr lang="en-US" sz="3200" dirty="0" smtClean="0">
+                <a:latin typeface="Times New Roman" pitchFamily="18" charset="0"/>
+                <a:cs typeface="Times New Roman" pitchFamily="18" charset="0"/>
+                <a:hlinkClick r:id="rId3"/>
+              </a:rPr>
+              <a:t>https://tokmakov.msk.ru/blog/item/74?ysclid=mn1o7zc7t5669184110</a:t>
+            </a:r>
+            <a:endParaRPr lang="en-US" sz="3200" dirty="0" smtClean="0">
               <a:latin typeface="Times New Roman" pitchFamily="18" charset="0"/>
               <a:cs typeface="Times New Roman" pitchFamily="18" charset="0"/>
             </a:endParaRPr>
           </a:p>
           <a:p>
             <a:pPr algn="just"/>
-            <a:r>
-              <a:rPr lang="ru-RU" sz="2400" dirty="0" smtClean="0">
-                <a:latin typeface="Times New Roman" pitchFamily="18" charset="0"/>
-                <a:cs typeface="Times New Roman" pitchFamily="18" charset="0"/>
-              </a:rPr>
-              <a:t>Как </a:t>
-            </a:r>
-            <a:r>
-              <a:rPr lang="ru-RU" sz="2400" dirty="0" smtClean="0">
-                <a:latin typeface="Times New Roman" pitchFamily="18" charset="0"/>
-                <a:cs typeface="Times New Roman" pitchFamily="18" charset="0"/>
-              </a:rPr>
-              <a:t>отобразить регистр накопления в Интерфейсе и в </a:t>
-            </a:r>
-            <a:r>
-              <a:rPr lang="ru-RU" sz="2400" dirty="0" smtClean="0">
-                <a:latin typeface="Times New Roman" pitchFamily="18" charset="0"/>
-                <a:cs typeface="Times New Roman" pitchFamily="18" charset="0"/>
-              </a:rPr>
-              <a:t>подсистеме</a:t>
-            </a:r>
-            <a:endParaRPr lang="en-US" sz="2400" dirty="0" smtClean="0">
-              <a:latin typeface="Times New Roman" pitchFamily="18" charset="0"/>
-              <a:cs typeface="Times New Roman" pitchFamily="18" charset="0"/>
-            </a:endParaRPr>
-          </a:p>
-          <a:p>
-            <a:pPr algn="just"/>
-            <a:r>
-              <a:rPr lang="en-US" sz="2400" dirty="0" smtClean="0">
-                <a:latin typeface="Times New Roman" pitchFamily="18" charset="0"/>
-                <a:cs typeface="Times New Roman" pitchFamily="18" charset="0"/>
-                <a:hlinkClick r:id="rId4"/>
-              </a:rPr>
-              <a:t>https://rutube.ru/video/ad659dec500903b8139ea8a79e580879</a:t>
-            </a:r>
-            <a:r>
-              <a:rPr lang="en-US" sz="2400" dirty="0" smtClean="0">
-                <a:latin typeface="Times New Roman" pitchFamily="18" charset="0"/>
-                <a:cs typeface="Times New Roman" pitchFamily="18" charset="0"/>
-                <a:hlinkClick r:id="rId4"/>
-              </a:rPr>
-              <a:t>/</a:t>
-            </a:r>
-            <a:endParaRPr lang="en-US" sz="2400" dirty="0" smtClean="0">
-              <a:latin typeface="Times New Roman" pitchFamily="18" charset="0"/>
-              <a:cs typeface="Times New Roman" pitchFamily="18" charset="0"/>
-            </a:endParaRPr>
-          </a:p>
-          <a:p>
-            <a:pPr algn="just"/>
-            <a:endParaRPr lang="ru-RU" sz="2400" dirty="0">
+            <a:endParaRPr lang="ru-RU" sz="3200" dirty="0">
               <a:latin typeface="Times New Roman" pitchFamily="18" charset="0"/>
               <a:cs typeface="Times New Roman" pitchFamily="18" charset="0"/>
             </a:endParaRPr>
@@ -3332,7 +3267,7 @@
         </p:nvSpPr>
         <p:spPr>
           <a:xfrm>
-            <a:off x="457200" y="-357214"/>
+            <a:off x="428596" y="-285776"/>
             <a:ext cx="8229600" cy="1143000"/>
           </a:xfrm>
         </p:spPr>
@@ -3342,90 +3277,9 @@
           <a:p>
             <a:r>
               <a:rPr lang="ru-RU" dirty="0" smtClean="0"/>
-              <a:t>Регистр накоплений</a:t>
+              <a:t>Документы</a:t>
             </a:r>
             <a:endParaRPr lang="ru-RU" dirty="0"/>
-          </a:p>
-        </p:txBody>
-      </p:sp>
-      <p:sp>
-        <p:nvSpPr>
-          <p:cNvPr id="4" name="Прямоугольник 3"/>
-          <p:cNvSpPr/>
-          <p:nvPr/>
-        </p:nvSpPr>
-        <p:spPr>
-          <a:xfrm>
-            <a:off x="0" y="500042"/>
-            <a:ext cx="9144000" cy="3416320"/>
-          </a:xfrm>
-          <a:prstGeom prst="rect">
-            <a:avLst/>
-          </a:prstGeom>
-        </p:spPr>
-        <p:txBody>
-          <a:bodyPr wrap="square">
-            <a:spAutoFit/>
-          </a:bodyPr>
-          <a:lstStyle/>
-          <a:p>
-            <a:pPr algn="just"/>
-            <a:r>
-              <a:rPr lang="ru-RU" b="1" dirty="0" smtClean="0">
-                <a:latin typeface="Times New Roman" pitchFamily="18" charset="0"/>
-                <a:cs typeface="Times New Roman" pitchFamily="18" charset="0"/>
-              </a:rPr>
-              <a:t>Регистр накопления в 1С</a:t>
-            </a:r>
-            <a:r>
-              <a:rPr lang="ru-RU" dirty="0" smtClean="0">
-                <a:latin typeface="Times New Roman" pitchFamily="18" charset="0"/>
-                <a:cs typeface="Times New Roman" pitchFamily="18" charset="0"/>
-              </a:rPr>
-              <a:t> — это специальный инструмент в программе «1С:Предприятие», который помогает автоматически учитывать движение разных ресурсов: товаров на складе, денег, материалов, объёмов продаж и т. д. Представьте себе большую электронную таблицу или книгу учёта, куда система записывает все изменения — например, сколько товара поступило, сколько продали, сколько денег пришло или ушло. Данные в регистре хранятся в разрезе разных параметров (их называют </a:t>
-            </a:r>
-            <a:r>
-              <a:rPr lang="ru-RU" i="1" dirty="0" smtClean="0">
-                <a:latin typeface="Times New Roman" pitchFamily="18" charset="0"/>
-                <a:cs typeface="Times New Roman" pitchFamily="18" charset="0"/>
-              </a:rPr>
-              <a:t>измерениями</a:t>
-            </a:r>
-            <a:r>
-              <a:rPr lang="ru-RU" dirty="0" smtClean="0">
-                <a:latin typeface="Times New Roman" pitchFamily="18" charset="0"/>
-                <a:cs typeface="Times New Roman" pitchFamily="18" charset="0"/>
-              </a:rPr>
-              <a:t>): например, по складам, видам товаров, подразделениям компании или контрагентам. В соответствующих колонках (</a:t>
-            </a:r>
-            <a:r>
-              <a:rPr lang="ru-RU" i="1" dirty="0" smtClean="0">
-                <a:latin typeface="Times New Roman" pitchFamily="18" charset="0"/>
-                <a:cs typeface="Times New Roman" pitchFamily="18" charset="0"/>
-              </a:rPr>
-              <a:t>ресурсах</a:t>
-            </a:r>
-            <a:r>
-              <a:rPr lang="ru-RU" dirty="0" smtClean="0">
-                <a:latin typeface="Times New Roman" pitchFamily="18" charset="0"/>
-                <a:cs typeface="Times New Roman" pitchFamily="18" charset="0"/>
-              </a:rPr>
-              <a:t>) фиксируются числовые значения — количество, сумма, стоимость и т. п. Каждая запись в регистре связана с </a:t>
-            </a:r>
-            <a:r>
-              <a:rPr lang="ru-RU" dirty="0" err="1" smtClean="0">
-                <a:latin typeface="Times New Roman" pitchFamily="18" charset="0"/>
-                <a:cs typeface="Times New Roman" pitchFamily="18" charset="0"/>
-              </a:rPr>
-              <a:t>документом‑основанием</a:t>
-            </a:r>
-            <a:r>
-              <a:rPr lang="ru-RU" dirty="0" smtClean="0">
-                <a:latin typeface="Times New Roman" pitchFamily="18" charset="0"/>
-                <a:cs typeface="Times New Roman" pitchFamily="18" charset="0"/>
-              </a:rPr>
-              <a:t> (например, накладной или платёжным поручением), который вызвал это изменение, и содержит дату операции. Так можно отследить, как менялись показатели со временем и получить сводную картину для анализа.</a:t>
-            </a:r>
           </a:p>
         </p:txBody>
       </p:sp>
@@ -3446,8 +3300,8 @@
         </p:blipFill>
         <p:spPr bwMode="auto">
           <a:xfrm>
-            <a:off x="2071670" y="4071942"/>
-            <a:ext cx="4791075" cy="2562225"/>
+            <a:off x="2428860" y="4286256"/>
+            <a:ext cx="3628408" cy="2571744"/>
           </a:xfrm>
           <a:prstGeom prst="rect">
             <a:avLst/>
@@ -3462,6 +3316,149 @@
           <a:effectLst/>
         </p:spPr>
       </p:pic>
+      <p:sp>
+        <p:nvSpPr>
+          <p:cNvPr id="5" name="Прямоугольник 4"/>
+          <p:cNvSpPr/>
+          <p:nvPr/>
+        </p:nvSpPr>
+        <p:spPr>
+          <a:xfrm>
+            <a:off x="0" y="500042"/>
+            <a:ext cx="9144000" cy="4031873"/>
+          </a:xfrm>
+          <a:prstGeom prst="rect">
+            <a:avLst/>
+          </a:prstGeom>
+        </p:spPr>
+        <p:txBody>
+          <a:bodyPr wrap="square">
+            <a:spAutoFit/>
+          </a:bodyPr>
+          <a:lstStyle/>
+          <a:p>
+            <a:pPr algn="just"/>
+            <a:r>
+              <a:rPr lang="ru-RU" sz="1600" dirty="0" smtClean="0">
+                <a:latin typeface="Times New Roman" pitchFamily="18" charset="0"/>
+                <a:cs typeface="Times New Roman" pitchFamily="18" charset="0"/>
+              </a:rPr>
+              <a:t>Документы в 1С нужны, чтобы записывать и учитывать все важные события в работе компании — как электронные чеки или записи в журнале.</a:t>
+            </a:r>
+          </a:p>
+          <a:p>
+            <a:pPr algn="just"/>
+            <a:r>
+              <a:rPr lang="ru-RU" sz="1600" dirty="0" smtClean="0">
+                <a:latin typeface="Times New Roman" pitchFamily="18" charset="0"/>
+                <a:cs typeface="Times New Roman" pitchFamily="18" charset="0"/>
+              </a:rPr>
+              <a:t>Например: продали товар → создали документ «Реализация», купили материалы → «Поступление», выдали зарплату → «Начисление зарплаты» и т. д.</a:t>
+            </a:r>
+          </a:p>
+          <a:p>
+            <a:pPr algn="just"/>
+            <a:r>
+              <a:rPr lang="ru-RU" sz="1600" dirty="0" smtClean="0">
+                <a:latin typeface="Times New Roman" pitchFamily="18" charset="0"/>
+                <a:cs typeface="Times New Roman" pitchFamily="18" charset="0"/>
+              </a:rPr>
+              <a:t>Зачем это надо:</a:t>
+            </a:r>
+          </a:p>
+          <a:p>
+            <a:pPr algn="just"/>
+            <a:r>
+              <a:rPr lang="ru-RU" sz="1600" dirty="0" smtClean="0">
+                <a:latin typeface="Times New Roman" pitchFamily="18" charset="0"/>
+                <a:cs typeface="Times New Roman" pitchFamily="18" charset="0"/>
+              </a:rPr>
+              <a:t>Запомнить, что и когда произошло (кто, кому, что продал, сколько денег пришло или ушло).</a:t>
+            </a:r>
+          </a:p>
+          <a:p>
+            <a:pPr algn="just"/>
+            <a:r>
+              <a:rPr lang="ru-RU" sz="1600" dirty="0" smtClean="0">
+                <a:latin typeface="Times New Roman" pitchFamily="18" charset="0"/>
+                <a:cs typeface="Times New Roman" pitchFamily="18" charset="0"/>
+              </a:rPr>
+              <a:t>Автоматически сделать бухгалтерские проводки — система сама запишет, как изменились деньги, товары, долги.</a:t>
+            </a:r>
+          </a:p>
+          <a:p>
+            <a:pPr algn="just"/>
+            <a:r>
+              <a:rPr lang="ru-RU" sz="1600" dirty="0" smtClean="0">
+                <a:latin typeface="Times New Roman" pitchFamily="18" charset="0"/>
+                <a:cs typeface="Times New Roman" pitchFamily="18" charset="0"/>
+              </a:rPr>
+              <a:t>Сформировать отчёты для налоговой и руководства (баланс, декларации и пр.).</a:t>
+            </a:r>
+          </a:p>
+          <a:p>
+            <a:pPr algn="just"/>
+            <a:r>
+              <a:rPr lang="ru-RU" sz="1600" dirty="0" smtClean="0">
+                <a:latin typeface="Times New Roman" pitchFamily="18" charset="0"/>
+                <a:cs typeface="Times New Roman" pitchFamily="18" charset="0"/>
+              </a:rPr>
+              <a:t>Иметь доказательство сделки — если придут с проверкой или будет спор.</a:t>
+            </a:r>
+          </a:p>
+          <a:p>
+            <a:pPr algn="just"/>
+            <a:r>
+              <a:rPr lang="ru-RU" sz="1600" dirty="0" smtClean="0">
+                <a:latin typeface="Times New Roman" pitchFamily="18" charset="0"/>
+                <a:cs typeface="Times New Roman" pitchFamily="18" charset="0"/>
+              </a:rPr>
+              <a:t>Быстро найти историю операций — что было вчера, месяц или год назад.</a:t>
+            </a:r>
+          </a:p>
+          <a:p>
+            <a:pPr algn="just"/>
+            <a:r>
+              <a:rPr lang="ru-RU" sz="1600" dirty="0" smtClean="0">
+                <a:latin typeface="Times New Roman" pitchFamily="18" charset="0"/>
+                <a:cs typeface="Times New Roman" pitchFamily="18" charset="0"/>
+              </a:rPr>
+              <a:t>Автоматизировать работу — не заполнять вручную десятки бумаг: ввёл данные один раз, а система сама сделала накладные, </a:t>
+            </a:r>
+            <a:r>
+              <a:rPr lang="ru-RU" sz="1600" dirty="0" err="1" smtClean="0">
+                <a:latin typeface="Times New Roman" pitchFamily="18" charset="0"/>
+                <a:cs typeface="Times New Roman" pitchFamily="18" charset="0"/>
+              </a:rPr>
+              <a:t>счета‑фактуры</a:t>
+            </a:r>
+            <a:r>
+              <a:rPr lang="ru-RU" sz="1600" dirty="0" smtClean="0">
+                <a:latin typeface="Times New Roman" pitchFamily="18" charset="0"/>
+                <a:cs typeface="Times New Roman" pitchFamily="18" charset="0"/>
+              </a:rPr>
+              <a:t>, подставила цифры в отчёты.</a:t>
+            </a:r>
+          </a:p>
+          <a:p>
+            <a:pPr algn="just"/>
+            <a:r>
+              <a:rPr lang="ru-RU" sz="1600" dirty="0" smtClean="0">
+                <a:latin typeface="Times New Roman" pitchFamily="18" charset="0"/>
+                <a:cs typeface="Times New Roman" pitchFamily="18" charset="0"/>
+              </a:rPr>
+              <a:t>Коротко: документы в 1С — это электронные записи о делах компании. Они помогают всё учесть, не запутаться, сэкономить время и правильно отчитаться перед налоговой.</a:t>
+            </a:r>
+          </a:p>
+          <a:p>
+            <a:pPr algn="just"/>
+            <a:endParaRPr lang="ru-RU" sz="1600" dirty="0">
+              <a:latin typeface="Times New Roman" pitchFamily="18" charset="0"/>
+              <a:cs typeface="Times New Roman" pitchFamily="18" charset="0"/>
+            </a:endParaRPr>
+          </a:p>
+        </p:txBody>
+      </p:sp>
     </p:spTree>
   </p:cSld>
   <p:clrMapOvr>
@@ -3471,163 +3468,6 @@
 </file>
 
 <file path=ppt/slides/slide4.xml><?xml version="1.0" encoding="utf-8"?>
-<p:sld xmlns:a="http://schemas.openxmlformats.org/drawingml/2006/main" xmlns:r="http://schemas.openxmlformats.org/officeDocument/2006/relationships" xmlns:p="http://schemas.openxmlformats.org/presentationml/2006/main">
-  <p:cSld>
-    <p:spTree>
-      <p:nvGrpSpPr>
-        <p:cNvPr id="1" name=""/>
-        <p:cNvGrpSpPr/>
-        <p:nvPr/>
-      </p:nvGrpSpPr>
-      <p:grpSpPr>
-        <a:xfrm>
-          <a:off x="0" y="0"/>
-          <a:ext cx="0" cy="0"/>
-          <a:chOff x="0" y="0"/>
-          <a:chExt cx="0" cy="0"/>
-        </a:xfrm>
-      </p:grpSpPr>
-      <p:sp>
-        <p:nvSpPr>
-          <p:cNvPr id="2" name="Заголовок 1"/>
-          <p:cNvSpPr>
-            <a:spLocks noGrp="1"/>
-          </p:cNvSpPr>
-          <p:nvPr>
-            <p:ph type="title"/>
-          </p:nvPr>
-        </p:nvSpPr>
-        <p:spPr>
-          <a:xfrm>
-            <a:off x="457200" y="-142900"/>
-            <a:ext cx="8229600" cy="1143000"/>
-          </a:xfrm>
-        </p:spPr>
-        <p:txBody>
-          <a:bodyPr/>
-          <a:lstStyle/>
-          <a:p>
-            <a:r>
-              <a:rPr lang="ru-RU" dirty="0" smtClean="0"/>
-              <a:t>Остатки</a:t>
-            </a:r>
-            <a:endParaRPr lang="ru-RU" dirty="0"/>
-          </a:p>
-        </p:txBody>
-      </p:sp>
-      <p:sp>
-        <p:nvSpPr>
-          <p:cNvPr id="3" name="Прямоугольник 2"/>
-          <p:cNvSpPr/>
-          <p:nvPr/>
-        </p:nvSpPr>
-        <p:spPr>
-          <a:xfrm>
-            <a:off x="0" y="714356"/>
-            <a:ext cx="9144000" cy="2308324"/>
-          </a:xfrm>
-          <a:prstGeom prst="rect">
-            <a:avLst/>
-          </a:prstGeom>
-        </p:spPr>
-        <p:txBody>
-          <a:bodyPr wrap="square">
-            <a:spAutoFit/>
-          </a:bodyPr>
-          <a:lstStyle/>
-          <a:p>
-            <a:pPr algn="just"/>
-            <a:r>
-              <a:rPr lang="ru-RU" b="1" dirty="0" smtClean="0">
-                <a:latin typeface="Times New Roman" pitchFamily="18" charset="0"/>
-                <a:cs typeface="Times New Roman" pitchFamily="18" charset="0"/>
-              </a:rPr>
-              <a:t>Остатки</a:t>
-            </a:r>
-            <a:r>
-              <a:rPr lang="ru-RU" dirty="0" smtClean="0">
-                <a:latin typeface="Times New Roman" pitchFamily="18" charset="0"/>
-                <a:cs typeface="Times New Roman" pitchFamily="18" charset="0"/>
-              </a:rPr>
-              <a:t> — это итоговые значения ресурсов на определённый момент времени. Например, сколько единиц конкретного товара лежит на складе прямо сейчас, сколько денег осталось на расчётном счёте или какой объём материалов есть в распоряжении цеха. Остатки показывают «состояние на дату»: они рассчитываются как начальный остаток плюс все поступления (приходы) минус все списания (расходы) за период до этой даты. Такой учёт удобен там, где важно знать текущее наличие </a:t>
-            </a:r>
-            <a:r>
-              <a:rPr lang="ru-RU" dirty="0" err="1" smtClean="0">
-                <a:latin typeface="Times New Roman" pitchFamily="18" charset="0"/>
-                <a:cs typeface="Times New Roman" pitchFamily="18" charset="0"/>
-              </a:rPr>
-              <a:t>чего‑либо</a:t>
-            </a:r>
-            <a:r>
-              <a:rPr lang="ru-RU" dirty="0" smtClean="0">
-                <a:latin typeface="Times New Roman" pitchFamily="18" charset="0"/>
-                <a:cs typeface="Times New Roman" pitchFamily="18" charset="0"/>
-              </a:rPr>
-              <a:t>: в складском учёте, контроле денежных средств, взаиморасчётах с контрагентами. Регистры накопления, которые хранят остатки, называются </a:t>
-            </a:r>
-            <a:r>
-              <a:rPr lang="ru-RU" i="1" dirty="0" smtClean="0">
-                <a:latin typeface="Times New Roman" pitchFamily="18" charset="0"/>
-                <a:cs typeface="Times New Roman" pitchFamily="18" charset="0"/>
-              </a:rPr>
-              <a:t>регистрами накопления остатков</a:t>
-            </a:r>
-            <a:r>
-              <a:rPr lang="ru-RU" dirty="0" smtClean="0">
-                <a:latin typeface="Times New Roman" pitchFamily="18" charset="0"/>
-                <a:cs typeface="Times New Roman" pitchFamily="18" charset="0"/>
-              </a:rPr>
-              <a:t>.</a:t>
-            </a:r>
-            <a:endParaRPr lang="en-US" dirty="0" smtClean="0">
-              <a:latin typeface="Times New Roman" pitchFamily="18" charset="0"/>
-              <a:cs typeface="Times New Roman" pitchFamily="18" charset="0"/>
-            </a:endParaRPr>
-          </a:p>
-        </p:txBody>
-      </p:sp>
-      <p:pic>
-        <p:nvPicPr>
-          <p:cNvPr id="4" name="Picture 4"/>
-          <p:cNvPicPr>
-            <a:picLocks noChangeAspect="1" noChangeArrowheads="1"/>
-          </p:cNvPicPr>
-          <p:nvPr/>
-        </p:nvPicPr>
-        <p:blipFill>
-          <a:blip r:embed="rId2"/>
-          <a:srcRect/>
-          <a:stretch>
-            <a:fillRect/>
-          </a:stretch>
-        </p:blipFill>
-        <p:spPr bwMode="auto">
-          <a:xfrm>
-            <a:off x="714348" y="3214686"/>
-            <a:ext cx="7643834" cy="2794175"/>
-          </a:xfrm>
-          <a:prstGeom prst="rect">
-            <a:avLst/>
-          </a:prstGeom>
-          <a:noFill/>
-          <a:ln w="9525">
-            <a:noFill/>
-            <a:miter lim="800000"/>
-            <a:headEnd/>
-            <a:tailEnd/>
-          </a:ln>
-          <a:effectLst/>
-        </p:spPr>
-      </p:pic>
-    </p:spTree>
-  </p:cSld>
-  <p:clrMapOvr>
-    <a:masterClrMapping/>
-  </p:clrMapOvr>
-</p:sld>
-</file>
-
-<file path=ppt/slides/slide5.xml><?xml version="1.0" encoding="utf-8"?>
 <p:sld xmlns:a="http://schemas.openxmlformats.org/drawingml/2006/main" xmlns:r="http://schemas.openxmlformats.org/officeDocument/2006/relationships" xmlns:p="http://schemas.openxmlformats.org/presentationml/2006/main">
   <p:cSld>
     <p:spTree>
@@ -3661,8 +3501,8 @@
         </p:blipFill>
         <p:spPr bwMode="auto">
           <a:xfrm>
-            <a:off x="0" y="0"/>
-            <a:ext cx="5933852" cy="2285992"/>
+            <a:off x="785786" y="2643182"/>
+            <a:ext cx="7008601" cy="4214818"/>
           </a:xfrm>
           <a:prstGeom prst="rect">
             <a:avLst/>
@@ -3685,72 +3525,162 @@
         </p:nvSpPr>
         <p:spPr>
           <a:xfrm>
-            <a:off x="0" y="2214554"/>
-            <a:ext cx="5261056" cy="369332"/>
+            <a:off x="0" y="0"/>
+            <a:ext cx="9144000" cy="2585323"/>
           </a:xfrm>
           <a:prstGeom prst="rect">
             <a:avLst/>
           </a:prstGeom>
         </p:spPr>
         <p:txBody>
-          <a:bodyPr wrap="none">
+          <a:bodyPr wrap="square">
             <a:spAutoFit/>
           </a:bodyPr>
           <a:lstStyle/>
           <a:p>
+            <a:pPr algn="just"/>
+            <a:r>
+              <a:rPr lang="ru-RU" b="1" dirty="0" smtClean="0">
+                <a:latin typeface="Times New Roman" pitchFamily="18" charset="0"/>
+                <a:cs typeface="Times New Roman" pitchFamily="18" charset="0"/>
+              </a:rPr>
+              <a:t>Форма документа в программе «1С»</a:t>
+            </a:r>
             <a:r>
               <a:rPr lang="ru-RU" dirty="0" smtClean="0">
                 <a:latin typeface="Times New Roman" pitchFamily="18" charset="0"/>
                 <a:cs typeface="Times New Roman" pitchFamily="18" charset="0"/>
               </a:rPr>
-              <a:t>Обработка проведения для документа Поступление</a:t>
-            </a:r>
-            <a:endParaRPr lang="ru-RU" dirty="0"/>
-          </a:p>
-        </p:txBody>
-      </p:sp>
-      <p:sp>
-        <p:nvSpPr>
-          <p:cNvPr id="4" name="Прямоугольник 3"/>
-          <p:cNvSpPr/>
+              <a:t> — это визуальный интерфейс, предназначенный для ввода, отображения и редактирования данных, связанных с конкретным документом (например, «Поступление товаров», «Реализация товаров и услуг»). </a:t>
+            </a:r>
+          </a:p>
+          <a:p>
+            <a:pPr algn="just"/>
+            <a:r>
+              <a:rPr lang="ru-RU" dirty="0" smtClean="0">
+                <a:latin typeface="Times New Roman" pitchFamily="18" charset="0"/>
+                <a:cs typeface="Times New Roman" pitchFamily="18" charset="0"/>
+              </a:rPr>
+              <a:t>Форма позволяет:</a:t>
+            </a:r>
+          </a:p>
+          <a:p>
+            <a:pPr algn="just"/>
+            <a:r>
+              <a:rPr lang="ru-RU" dirty="0" smtClean="0">
+                <a:latin typeface="Times New Roman" pitchFamily="18" charset="0"/>
+                <a:cs typeface="Times New Roman" pitchFamily="18" charset="0"/>
+              </a:rPr>
+              <a:t>вводить данные в поля и табличные части формы;</a:t>
+            </a:r>
+          </a:p>
+          <a:p>
+            <a:pPr algn="just"/>
+            <a:r>
+              <a:rPr lang="ru-RU" dirty="0" smtClean="0">
+                <a:latin typeface="Times New Roman" pitchFamily="18" charset="0"/>
+                <a:cs typeface="Times New Roman" pitchFamily="18" charset="0"/>
+              </a:rPr>
+              <a:t>просматривать данные, хранящиеся в базе данных, в удобном и структурированном виде;</a:t>
+            </a:r>
+          </a:p>
+          <a:p>
+            <a:pPr algn="just"/>
+            <a:r>
+              <a:rPr lang="ru-RU" dirty="0" smtClean="0">
+                <a:latin typeface="Times New Roman" pitchFamily="18" charset="0"/>
+                <a:cs typeface="Times New Roman" pitchFamily="18" charset="0"/>
+              </a:rPr>
+              <a:t>редактировать данные, используя элементы управления формы;</a:t>
+            </a:r>
+          </a:p>
+          <a:p>
+            <a:pPr algn="just"/>
+            <a:r>
+              <a:rPr lang="ru-RU" dirty="0" smtClean="0">
+                <a:latin typeface="Times New Roman" pitchFamily="18" charset="0"/>
+                <a:cs typeface="Times New Roman" pitchFamily="18" charset="0"/>
+              </a:rPr>
+              <a:t>сохранять введённые или изменённые данные в базе данных;</a:t>
+            </a:r>
+          </a:p>
+          <a:p>
+            <a:pPr algn="just"/>
+            <a:r>
+              <a:rPr lang="ru-RU" dirty="0" smtClean="0">
+                <a:latin typeface="Times New Roman" pitchFamily="18" charset="0"/>
+                <a:cs typeface="Times New Roman" pitchFamily="18" charset="0"/>
+              </a:rPr>
+              <a:t>распечатывать документы на основании данных, отображаемых на форме.</a:t>
+            </a:r>
+            <a:endParaRPr lang="ru-RU" dirty="0">
+              <a:latin typeface="Times New Roman" pitchFamily="18" charset="0"/>
+              <a:cs typeface="Times New Roman" pitchFamily="18" charset="0"/>
+            </a:endParaRPr>
+          </a:p>
+        </p:txBody>
+      </p:sp>
+    </p:spTree>
+  </p:cSld>
+  <p:clrMapOvr>
+    <a:masterClrMapping/>
+  </p:clrMapOvr>
+</p:sld>
+</file>
+
+<file path=ppt/slides/slide5.xml><?xml version="1.0" encoding="utf-8"?>
+<p:sld xmlns:a="http://schemas.openxmlformats.org/drawingml/2006/main" xmlns:r="http://schemas.openxmlformats.org/officeDocument/2006/relationships" xmlns:p="http://schemas.openxmlformats.org/presentationml/2006/main">
+  <p:cSld>
+    <p:spTree>
+      <p:nvGrpSpPr>
+        <p:cNvPr id="1" name=""/>
+        <p:cNvGrpSpPr/>
+        <p:nvPr/>
+      </p:nvGrpSpPr>
+      <p:grpSpPr>
+        <a:xfrm>
+          <a:off x="0" y="0"/>
+          <a:ext cx="0" cy="0"/>
+          <a:chOff x="0" y="0"/>
+          <a:chExt cx="0" cy="0"/>
+        </a:xfrm>
+      </p:grpSpPr>
+      <p:pic>
+        <p:nvPicPr>
+          <p:cNvPr id="3074" name="Picture 2"/>
+          <p:cNvPicPr>
+            <a:picLocks noChangeAspect="1" noChangeArrowheads="1"/>
+          </p:cNvPicPr>
           <p:nvPr/>
-        </p:nvSpPr>
-        <p:spPr>
+        </p:nvPicPr>
+        <p:blipFill>
+          <a:blip r:embed="rId2"/>
+          <a:srcRect/>
+          <a:stretch>
+            <a:fillRect/>
+          </a:stretch>
+        </p:blipFill>
+        <p:spPr bwMode="auto">
           <a:xfrm>
-            <a:off x="5572132" y="1142984"/>
-            <a:ext cx="3571868" cy="923330"/>
+            <a:off x="0" y="487924"/>
+            <a:ext cx="9096375" cy="2828925"/>
           </a:xfrm>
           <a:prstGeom prst="rect">
             <a:avLst/>
           </a:prstGeom>
+          <a:noFill/>
+          <a:ln w="9525">
+            <a:noFill/>
+            <a:miter lim="800000"/>
+            <a:headEnd/>
+            <a:tailEnd/>
+          </a:ln>
+          <a:effectLst/>
         </p:spPr>
-        <p:txBody>
-          <a:bodyPr wrap="square">
-            <a:spAutoFit/>
-          </a:bodyPr>
-          <a:lstStyle/>
-          <a:p>
-            <a:r>
-              <a:rPr lang="ru-RU" dirty="0" smtClean="0">
-                <a:latin typeface="Times New Roman" pitchFamily="18" charset="0"/>
-                <a:cs typeface="Times New Roman" pitchFamily="18" charset="0"/>
-              </a:rPr>
-              <a:t>Для документа Продажа тоже самое, но </a:t>
-            </a:r>
-            <a:r>
-              <a:rPr lang="ru-RU" dirty="0" err="1" smtClean="0">
-                <a:latin typeface="Times New Roman" pitchFamily="18" charset="0"/>
-                <a:cs typeface="Times New Roman" pitchFamily="18" charset="0"/>
-              </a:rPr>
-              <a:t>ВидДвиженияНакопления.Расход</a:t>
-            </a:r>
-            <a:endParaRPr lang="ru-RU" dirty="0"/>
-          </a:p>
-        </p:txBody>
-      </p:sp>
+      </p:pic>
       <p:pic>
         <p:nvPicPr>
-          <p:cNvPr id="2052" name="Picture 4"/>
+          <p:cNvPr id="3075" name="Picture 3"/>
           <p:cNvPicPr>
             <a:picLocks noChangeAspect="1" noChangeArrowheads="1"/>
           </p:cNvPicPr>
@@ -3765,8 +3695,8 @@
         </p:blipFill>
         <p:spPr bwMode="auto">
           <a:xfrm>
-            <a:off x="0" y="4318712"/>
-            <a:ext cx="9144000" cy="2539288"/>
+            <a:off x="3876675" y="2631040"/>
+            <a:ext cx="5267325" cy="1476375"/>
           </a:xfrm>
           <a:prstGeom prst="rect">
             <a:avLst/>
@@ -3781,16 +3711,88 @@
           <a:effectLst/>
         </p:spPr>
       </p:pic>
-      <p:sp>
-        <p:nvSpPr>
-          <p:cNvPr id="8" name="Прямоугольник 7"/>
+      <p:cxnSp>
+        <p:nvCxnSpPr>
+          <p:cNvPr id="5" name="Прямая со стрелкой 4"/>
+          <p:cNvCxnSpPr/>
+          <p:nvPr/>
+        </p:nvCxnSpPr>
+        <p:spPr>
+          <a:xfrm rot="10800000" flipV="1">
+            <a:off x="6572264" y="2416726"/>
+            <a:ext cx="1785950" cy="1143008"/>
+          </a:xfrm>
+          <a:prstGeom prst="straightConnector1">
+            <a:avLst/>
+          </a:prstGeom>
+          <a:ln w="19050">
+            <a:solidFill>
+              <a:srgbClr val="FF0000"/>
+            </a:solidFill>
+            <a:tailEnd type="arrow"/>
+          </a:ln>
+        </p:spPr>
+        <p:style>
+          <a:lnRef idx="1">
+            <a:schemeClr val="accent1"/>
+          </a:lnRef>
+          <a:fillRef idx="0">
+            <a:schemeClr val="accent1"/>
+          </a:fillRef>
+          <a:effectRef idx="0">
+            <a:schemeClr val="accent1"/>
+          </a:effectRef>
+          <a:fontRef idx="minor">
+            <a:schemeClr val="tx1"/>
+          </a:fontRef>
+        </p:style>
+      </p:cxnSp>
+      <p:cxnSp>
+        <p:nvCxnSpPr>
+          <p:cNvPr id="6" name="Прямая со стрелкой 5"/>
+          <p:cNvCxnSpPr/>
+          <p:nvPr/>
+        </p:nvCxnSpPr>
+        <p:spPr>
+          <a:xfrm rot="16200000" flipH="1">
+            <a:off x="571472" y="2345288"/>
+            <a:ext cx="3000396" cy="714380"/>
+          </a:xfrm>
+          <a:prstGeom prst="straightConnector1">
+            <a:avLst/>
+          </a:prstGeom>
+          <a:ln w="19050">
+            <a:solidFill>
+              <a:srgbClr val="FF0000"/>
+            </a:solidFill>
+            <a:tailEnd type="arrow"/>
+          </a:ln>
+        </p:spPr>
+        <p:style>
+          <a:lnRef idx="1">
+            <a:schemeClr val="accent1"/>
+          </a:lnRef>
+          <a:fillRef idx="0">
+            <a:schemeClr val="accent1"/>
+          </a:fillRef>
+          <a:effectRef idx="0">
+            <a:schemeClr val="accent1"/>
+          </a:effectRef>
+          <a:fontRef idx="minor">
+            <a:schemeClr val="tx1"/>
+          </a:fontRef>
+        </p:style>
+      </p:cxnSp>
+      <p:sp>
+        <p:nvSpPr>
+          <p:cNvPr id="10" name="Прямоугольник 9"/>
           <p:cNvSpPr/>
           <p:nvPr/>
         </p:nvSpPr>
         <p:spPr>
           <a:xfrm>
-            <a:off x="0" y="2716596"/>
-            <a:ext cx="9144000" cy="1569660"/>
+            <a:off x="0" y="4206603"/>
+            <a:ext cx="7143704" cy="2031325"/>
           </a:xfrm>
           <a:prstGeom prst="rect">
             <a:avLst/>
@@ -3804,81 +3806,261 @@
           <a:p>
             <a:pPr algn="just"/>
             <a:r>
-              <a:rPr lang="ru-RU" sz="1600" dirty="0" smtClean="0">
-                <a:latin typeface="Times New Roman" pitchFamily="18" charset="0"/>
-                <a:cs typeface="Times New Roman" pitchFamily="18" charset="0"/>
-              </a:rPr>
-              <a:t>В запросе указывается: взять из регистра накопления </a:t>
-            </a:r>
-            <a:r>
-              <a:rPr lang="ru-RU" sz="1600" dirty="0" err="1" smtClean="0">
-                <a:latin typeface="Times New Roman" pitchFamily="18" charset="0"/>
-                <a:cs typeface="Times New Roman" pitchFamily="18" charset="0"/>
-              </a:rPr>
-              <a:t>УчётКанцтоваров</a:t>
-            </a:r>
-            <a:r>
-              <a:rPr lang="ru-RU" sz="1600" dirty="0" smtClean="0">
-                <a:latin typeface="Times New Roman" pitchFamily="18" charset="0"/>
-                <a:cs typeface="Times New Roman" pitchFamily="18" charset="0"/>
-              </a:rPr>
-              <a:t> данные об остатках на определённую дату (используется виртуальная таблица .Остатки).</a:t>
+              <a:rPr lang="ru-RU" dirty="0" smtClean="0">
+                <a:latin typeface="Times New Roman" pitchFamily="18" charset="0"/>
+                <a:cs typeface="Times New Roman" pitchFamily="18" charset="0"/>
+              </a:rPr>
+              <a:t>Создаётся объект Запрос для работы с данными.</a:t>
             </a:r>
           </a:p>
           <a:p>
             <a:pPr algn="just"/>
             <a:r>
-              <a:rPr lang="ru-RU" sz="1600" dirty="0" smtClean="0">
-                <a:latin typeface="Times New Roman" pitchFamily="18" charset="0"/>
-                <a:cs typeface="Times New Roman" pitchFamily="18" charset="0"/>
-              </a:rPr>
-              <a:t>В результате запроса нужны два поля: наименование товара (Товар) и количество этого товара на остатке (</a:t>
-            </a:r>
-            <a:r>
-              <a:rPr lang="ru-RU" sz="1600" dirty="0" err="1" smtClean="0">
-                <a:latin typeface="Times New Roman" pitchFamily="18" charset="0"/>
-                <a:cs typeface="Times New Roman" pitchFamily="18" charset="0"/>
-              </a:rPr>
-              <a:t>КоличествоОстаток</a:t>
-            </a:r>
-            <a:r>
-              <a:rPr lang="ru-RU" sz="1600" dirty="0" smtClean="0">
-                <a:latin typeface="Times New Roman" pitchFamily="18" charset="0"/>
-                <a:cs typeface="Times New Roman" pitchFamily="18" charset="0"/>
-              </a:rPr>
-              <a:t>).</a:t>
+              <a:rPr lang="ru-RU" dirty="0" smtClean="0">
+                <a:latin typeface="Times New Roman" pitchFamily="18" charset="0"/>
+                <a:cs typeface="Times New Roman" pitchFamily="18" charset="0"/>
+              </a:rPr>
+              <a:t>В тексте запроса описывается выборка из справочника Товары:</a:t>
+            </a:r>
+          </a:p>
+          <a:p>
+            <a:pPr algn="just">
+              <a:buFont typeface="Arial" pitchFamily="34" charset="0"/>
+              <a:buChar char="•"/>
+            </a:pPr>
+            <a:r>
+              <a:rPr lang="ru-RU" dirty="0" err="1" smtClean="0">
+                <a:latin typeface="Times New Roman" pitchFamily="18" charset="0"/>
+                <a:cs typeface="Times New Roman" pitchFamily="18" charset="0"/>
+              </a:rPr>
+              <a:t>Товары.Ссылка</a:t>
+            </a:r>
+            <a:r>
+              <a:rPr lang="ru-RU" dirty="0" smtClean="0">
+                <a:latin typeface="Times New Roman" pitchFamily="18" charset="0"/>
+                <a:cs typeface="Times New Roman" pitchFamily="18" charset="0"/>
+              </a:rPr>
+              <a:t> (ссылка на элемент справочника) возвращается как поле Товар;</a:t>
+            </a:r>
+          </a:p>
+          <a:p>
+            <a:pPr algn="just">
+              <a:buFont typeface="Arial" pitchFamily="34" charset="0"/>
+              <a:buChar char="•"/>
+            </a:pPr>
+            <a:r>
+              <a:rPr lang="ru-RU" dirty="0" err="1" smtClean="0">
+                <a:latin typeface="Times New Roman" pitchFamily="18" charset="0"/>
+                <a:cs typeface="Times New Roman" pitchFamily="18" charset="0"/>
+              </a:rPr>
+              <a:t>Товары.ТекущаяЦена</a:t>
+            </a:r>
+            <a:r>
+              <a:rPr lang="ru-RU" dirty="0" smtClean="0">
+                <a:latin typeface="Times New Roman" pitchFamily="18" charset="0"/>
+                <a:cs typeface="Times New Roman" pitchFamily="18" charset="0"/>
+              </a:rPr>
+              <a:t> возвращается как поле </a:t>
+            </a:r>
+            <a:r>
+              <a:rPr lang="ru-RU" dirty="0" err="1" smtClean="0">
+                <a:latin typeface="Times New Roman" pitchFamily="18" charset="0"/>
+                <a:cs typeface="Times New Roman" pitchFamily="18" charset="0"/>
+              </a:rPr>
+              <a:t>СтараяЦена</a:t>
+            </a:r>
+            <a:r>
+              <a:rPr lang="ru-RU" dirty="0" smtClean="0">
+                <a:latin typeface="Times New Roman" pitchFamily="18" charset="0"/>
+                <a:cs typeface="Times New Roman" pitchFamily="18" charset="0"/>
+              </a:rPr>
+              <a:t>;</a:t>
             </a:r>
           </a:p>
           <a:p>
             <a:pPr algn="just"/>
             <a:r>
-              <a:rPr lang="ru-RU" sz="1600" dirty="0" smtClean="0">
-                <a:latin typeface="Times New Roman" pitchFamily="18" charset="0"/>
-                <a:cs typeface="Times New Roman" pitchFamily="18" charset="0"/>
-              </a:rPr>
-              <a:t>Для таблицы в запросе задаётся временное имя (псевдоним) </a:t>
-            </a:r>
-            <a:r>
-              <a:rPr lang="ru-RU" sz="1600" dirty="0" err="1" smtClean="0">
-                <a:latin typeface="Times New Roman" pitchFamily="18" charset="0"/>
-                <a:cs typeface="Times New Roman" pitchFamily="18" charset="0"/>
-              </a:rPr>
-              <a:t>УчётКанцтоваровОстатки</a:t>
-            </a:r>
-            <a:r>
-              <a:rPr lang="ru-RU" sz="1600" dirty="0" smtClean="0">
-                <a:latin typeface="Times New Roman" pitchFamily="18" charset="0"/>
-                <a:cs typeface="Times New Roman" pitchFamily="18" charset="0"/>
-              </a:rPr>
-              <a:t> — чтобы удобно ссылаться на неё в других частях запроса.</a:t>
-            </a:r>
-            <a:endParaRPr lang="ru-RU" sz="1600" dirty="0">
+              <a:rPr lang="ru-RU" dirty="0" smtClean="0">
+                <a:latin typeface="Times New Roman" pitchFamily="18" charset="0"/>
+                <a:cs typeface="Times New Roman" pitchFamily="18" charset="0"/>
+              </a:rPr>
+              <a:t>условие ГДЕ фильтрует записи: выбираются только </a:t>
+            </a:r>
+            <a:r>
+              <a:rPr lang="ru-RU" dirty="0" err="1" smtClean="0">
+                <a:latin typeface="Times New Roman" pitchFamily="18" charset="0"/>
+                <a:cs typeface="Times New Roman" pitchFamily="18" charset="0"/>
+              </a:rPr>
+              <a:t>Товары.Родитель</a:t>
+            </a:r>
+            <a:r>
+              <a:rPr lang="ru-RU" dirty="0" smtClean="0">
+                <a:latin typeface="Times New Roman" pitchFamily="18" charset="0"/>
+                <a:cs typeface="Times New Roman" pitchFamily="18" charset="0"/>
+              </a:rPr>
+              <a:t>, принадлежащие к группе, указанной в параметре &amp;</a:t>
+            </a:r>
+            <a:r>
+              <a:rPr lang="ru-RU" dirty="0" err="1" smtClean="0">
+                <a:latin typeface="Times New Roman" pitchFamily="18" charset="0"/>
+                <a:cs typeface="Times New Roman" pitchFamily="18" charset="0"/>
+              </a:rPr>
+              <a:t>ТекущаяГруппа</a:t>
+            </a:r>
+            <a:r>
+              <a:rPr lang="ru-RU" dirty="0" smtClean="0">
+                <a:latin typeface="Times New Roman" pitchFamily="18" charset="0"/>
+                <a:cs typeface="Times New Roman" pitchFamily="18" charset="0"/>
+              </a:rPr>
+              <a:t>.</a:t>
+            </a:r>
+            <a:endParaRPr lang="ru-RU" dirty="0">
               <a:latin typeface="Times New Roman" pitchFamily="18" charset="0"/>
               <a:cs typeface="Times New Roman" pitchFamily="18" charset="0"/>
             </a:endParaRPr>
           </a:p>
         </p:txBody>
       </p:sp>
+      <p:sp>
+        <p:nvSpPr>
+          <p:cNvPr id="11" name="Прямоугольник 10"/>
+          <p:cNvSpPr/>
+          <p:nvPr/>
+        </p:nvSpPr>
+        <p:spPr>
+          <a:xfrm>
+            <a:off x="2285984" y="6488692"/>
+            <a:ext cx="4522456" cy="369332"/>
+          </a:xfrm>
+          <a:prstGeom prst="rect">
+            <a:avLst/>
+          </a:prstGeom>
+        </p:spPr>
+        <p:txBody>
+          <a:bodyPr wrap="none">
+            <a:spAutoFit/>
+          </a:bodyPr>
+          <a:lstStyle/>
+          <a:p>
+            <a:r>
+              <a:rPr lang="ru-RU" i="1" dirty="0" smtClean="0">
+                <a:latin typeface="Times New Roman" pitchFamily="18" charset="0"/>
+                <a:cs typeface="Times New Roman" pitchFamily="18" charset="0"/>
+              </a:rPr>
+              <a:t>Не забудьте вызвать процедуру на клиенте</a:t>
+            </a:r>
+            <a:endParaRPr lang="ru-RU" i="1" dirty="0"/>
+          </a:p>
+        </p:txBody>
+      </p:sp>
+      <p:sp>
+        <p:nvSpPr>
+          <p:cNvPr id="12" name="Прямоугольник 11"/>
+          <p:cNvSpPr/>
+          <p:nvPr/>
+        </p:nvSpPr>
+        <p:spPr>
+          <a:xfrm>
+            <a:off x="4143372" y="0"/>
+            <a:ext cx="1032655" cy="369332"/>
+          </a:xfrm>
+          <a:prstGeom prst="rect">
+            <a:avLst/>
+          </a:prstGeom>
+        </p:spPr>
+        <p:txBody>
+          <a:bodyPr wrap="none">
+            <a:spAutoFit/>
+          </a:bodyPr>
+          <a:lstStyle/>
+          <a:p>
+            <a:pPr algn="ctr"/>
+            <a:r>
+              <a:rPr lang="ru-RU" b="1" dirty="0" smtClean="0">
+                <a:latin typeface="Times New Roman" pitchFamily="18" charset="0"/>
+                <a:cs typeface="Times New Roman" pitchFamily="18" charset="0"/>
+              </a:rPr>
+              <a:t>Пункт </a:t>
+            </a:r>
+            <a:r>
+              <a:rPr lang="en-US" b="1" dirty="0" smtClean="0">
+                <a:latin typeface="Times New Roman" pitchFamily="18" charset="0"/>
+                <a:cs typeface="Times New Roman" pitchFamily="18" charset="0"/>
+              </a:rPr>
+              <a:t>4</a:t>
+            </a:r>
+          </a:p>
+        </p:txBody>
+      </p:sp>
+      <p:pic>
+        <p:nvPicPr>
+          <p:cNvPr id="1026" name="Picture 2"/>
+          <p:cNvPicPr>
+            <a:picLocks noChangeAspect="1" noChangeArrowheads="1"/>
+          </p:cNvPicPr>
+          <p:nvPr/>
+        </p:nvPicPr>
+        <p:blipFill>
+          <a:blip r:embed="rId4"/>
+          <a:srcRect/>
+          <a:stretch>
+            <a:fillRect/>
+          </a:stretch>
+        </p:blipFill>
+        <p:spPr bwMode="auto">
+          <a:xfrm>
+            <a:off x="5257800" y="142852"/>
+            <a:ext cx="3886200" cy="1171575"/>
+          </a:xfrm>
+          <a:prstGeom prst="rect">
+            <a:avLst/>
+          </a:prstGeom>
+          <a:noFill/>
+          <a:ln w="9525">
+            <a:noFill/>
+            <a:miter lim="800000"/>
+            <a:headEnd/>
+            <a:tailEnd/>
+          </a:ln>
+          <a:effectLst/>
+        </p:spPr>
+      </p:pic>
+      <p:cxnSp>
+        <p:nvCxnSpPr>
+          <p:cNvPr id="13" name="Прямая со стрелкой 12"/>
+          <p:cNvCxnSpPr/>
+          <p:nvPr/>
+        </p:nvCxnSpPr>
+        <p:spPr>
+          <a:xfrm flipV="1">
+            <a:off x="2000232" y="928670"/>
+            <a:ext cx="3286148" cy="214314"/>
+          </a:xfrm>
+          <a:prstGeom prst="straightConnector1">
+            <a:avLst/>
+          </a:prstGeom>
+          <a:ln w="19050">
+            <a:solidFill>
+              <a:srgbClr val="FF0000"/>
+            </a:solidFill>
+            <a:tailEnd type="arrow"/>
+          </a:ln>
+        </p:spPr>
+        <p:style>
+          <a:lnRef idx="1">
+            <a:schemeClr val="accent1"/>
+          </a:lnRef>
+          <a:fillRef idx="0">
+            <a:schemeClr val="accent1"/>
+          </a:fillRef>
+          <a:effectRef idx="0">
+            <a:schemeClr val="accent1"/>
+          </a:effectRef>
+          <a:fontRef idx="minor">
+            <a:schemeClr val="tx1"/>
+          </a:fontRef>
+        </p:style>
+      </p:cxnSp>
     </p:spTree>
   </p:cSld>
   <p:clrMapOvr>
@@ -3906,7 +4088,7 @@
       </p:grpSpPr>
       <p:pic>
         <p:nvPicPr>
-          <p:cNvPr id="4097" name="Picture 1"/>
+          <p:cNvPr id="17410" name="Picture 2"/>
           <p:cNvPicPr>
             <a:picLocks noChangeAspect="1" noChangeArrowheads="1"/>
           </p:cNvPicPr>
@@ -3921,8 +4103,8 @@
         </p:blipFill>
         <p:spPr bwMode="auto">
           <a:xfrm>
-            <a:off x="0" y="0"/>
-            <a:ext cx="7128217" cy="3214686"/>
+            <a:off x="2357422" y="3000372"/>
+            <a:ext cx="4482132" cy="1143008"/>
           </a:xfrm>
           <a:prstGeom prst="rect">
             <a:avLst/>
@@ -3937,6 +4119,39 @@
           <a:effectLst/>
         </p:spPr>
       </p:pic>
+      <p:pic>
+        <p:nvPicPr>
+          <p:cNvPr id="17413" name="Picture 5"/>
+          <p:cNvPicPr>
+            <a:picLocks noChangeAspect="1" noChangeArrowheads="1"/>
+          </p:cNvPicPr>
+          <p:nvPr/>
+        </p:nvPicPr>
+        <p:blipFill>
+          <a:blip r:embed="rId3"/>
+          <a:srcRect/>
+          <a:stretch>
+            <a:fillRect/>
+          </a:stretch>
+        </p:blipFill>
+        <p:spPr bwMode="auto">
+          <a:xfrm>
+            <a:off x="616273" y="4429133"/>
+            <a:ext cx="8016186" cy="2114552"/>
+          </a:xfrm>
+          <a:prstGeom prst="rect">
+            <a:avLst/>
+          </a:prstGeom>
+          <a:noFill/>
+          <a:ln w="9525">
+            <a:noFill/>
+            <a:miter lim="800000"/>
+            <a:headEnd/>
+            <a:tailEnd/>
+          </a:ln>
+          <a:effectLst/>
+        </p:spPr>
+      </p:pic>
       <p:sp>
         <p:nvSpPr>
           <p:cNvPr id="6" name="Прямоугольник 5"/>
@@ -3945,8 +4160,8 @@
         </p:nvSpPr>
         <p:spPr>
           <a:xfrm>
-            <a:off x="5715008" y="0"/>
-            <a:ext cx="3428992" cy="2462213"/>
+            <a:off x="0" y="0"/>
+            <a:ext cx="9144000" cy="2862322"/>
           </a:xfrm>
           <a:prstGeom prst="rect">
             <a:avLst/>
@@ -3960,31 +4175,47 @@
           <a:p>
             <a:pPr algn="just"/>
             <a:r>
-              <a:rPr lang="ru-RU" sz="1400" dirty="0" smtClean="0"/>
-              <a:t>Запрос работает, но имеет ограничения: он берёт данные напрямую из документов Продажа, а не из регистра накопления. Это значит, что:</a:t>
+              <a:rPr lang="ru-RU" b="1" dirty="0" smtClean="0">
+                <a:latin typeface="Times New Roman" pitchFamily="18" charset="0"/>
+                <a:cs typeface="Times New Roman" pitchFamily="18" charset="0"/>
+              </a:rPr>
+              <a:t>Обработка проведения </a:t>
+            </a:r>
+            <a:r>
+              <a:rPr lang="ru-RU" dirty="0" smtClean="0">
+                <a:latin typeface="Times New Roman" pitchFamily="18" charset="0"/>
+                <a:cs typeface="Times New Roman" pitchFamily="18" charset="0"/>
+              </a:rPr>
+              <a:t>— это специальный алгоритм (процедура) в модуле документа 1С, который запускается при нажатии кнопки «Провести». Он выполняет все действия, ради которых документ создавался: преобразует данные из формы документа в изменения в других частях </a:t>
+            </a:r>
+            <a:r>
+              <a:rPr lang="ru-RU" dirty="0" err="1" smtClean="0">
+                <a:latin typeface="Times New Roman" pitchFamily="18" charset="0"/>
+                <a:cs typeface="Times New Roman" pitchFamily="18" charset="0"/>
+              </a:rPr>
+              <a:t>системы.В</a:t>
+            </a:r>
+            <a:r>
+              <a:rPr lang="ru-RU" dirty="0" smtClean="0">
+                <a:latin typeface="Times New Roman" pitchFamily="18" charset="0"/>
+                <a:cs typeface="Times New Roman" pitchFamily="18" charset="0"/>
+              </a:rPr>
+              <a:t> нашем случае — берёт список ноутбуков с новыми ценами из документа «Изменение цен» и обновляет соответствующие записи в справочнике «Товары».</a:t>
             </a:r>
           </a:p>
           <a:p>
             <a:pPr algn="just"/>
             <a:r>
-              <a:rPr lang="ru-RU" sz="1400" dirty="0" smtClean="0"/>
-              <a:t>не учитываются корректировки, сделанные другими документами (если они появятся);</a:t>
-            </a:r>
-          </a:p>
-          <a:p>
-            <a:pPr algn="just"/>
-            <a:r>
-              <a:rPr lang="ru-RU" sz="1400" dirty="0" smtClean="0"/>
-              <a:t>нет интеграции с общей системой учёта остатков и оборотов;</a:t>
-            </a:r>
-          </a:p>
-          <a:p>
-            <a:pPr algn="just"/>
-            <a:r>
-              <a:rPr lang="ru-RU" sz="1400" dirty="0" smtClean="0"/>
-              <a:t>возможны расхождения с данными регистра, если есть ручные операции.</a:t>
-            </a:r>
-            <a:endParaRPr lang="ru-RU" sz="1400" dirty="0"/>
+              <a:rPr lang="ru-RU" dirty="0" smtClean="0">
+                <a:latin typeface="Times New Roman" pitchFamily="18" charset="0"/>
+                <a:cs typeface="Times New Roman" pitchFamily="18" charset="0"/>
+              </a:rPr>
+              <a:t>Обработка проведения документа — это «двигатель» учёта в 1С. Она превращает форму с данными (документ) в реальные учётные записи (движения в регистрах, изменения в справочниках). Без неё документы были бы просто электронными бланками без влияния на состояние системы.</a:t>
+            </a:r>
+            <a:endParaRPr lang="ru-RU" dirty="0">
+              <a:latin typeface="Times New Roman" pitchFamily="18" charset="0"/>
+              <a:cs typeface="Times New Roman" pitchFamily="18" charset="0"/>
+            </a:endParaRPr>
           </a:p>
         </p:txBody>
       </p:sp>
@@ -3996,156 +4227,28 @@
         </p:nvSpPr>
         <p:spPr>
           <a:xfrm>
-            <a:off x="0" y="3214686"/>
-            <a:ext cx="9144000" cy="3139321"/>
+            <a:off x="3929058" y="6488668"/>
+            <a:ext cx="1032655" cy="369332"/>
           </a:xfrm>
           <a:prstGeom prst="rect">
             <a:avLst/>
           </a:prstGeom>
         </p:spPr>
         <p:txBody>
-          <a:bodyPr wrap="square">
+          <a:bodyPr wrap="none">
             <a:spAutoFit/>
           </a:bodyPr>
           <a:lstStyle/>
           <a:p>
-            <a:pPr algn="just"/>
-            <a:r>
-              <a:rPr lang="ru-RU" dirty="0" err="1" smtClean="0">
-                <a:latin typeface="Times New Roman" pitchFamily="18" charset="0"/>
-                <a:cs typeface="Times New Roman" pitchFamily="18" charset="0"/>
-              </a:rPr>
-              <a:t>Документ.Продажа.Товары</a:t>
-            </a:r>
-            <a:r>
-              <a:rPr lang="ru-RU" dirty="0" smtClean="0">
-                <a:latin typeface="Times New Roman" pitchFamily="18" charset="0"/>
-                <a:cs typeface="Times New Roman" pitchFamily="18" charset="0"/>
-              </a:rPr>
-              <a:t> — источник данных: табличная часть документа «Продажа», где хранятся строки с товарами, количеством и т. д.;</a:t>
-            </a:r>
-          </a:p>
-          <a:p>
-            <a:pPr algn="just"/>
-            <a:r>
-              <a:rPr lang="ru-RU" dirty="0" smtClean="0">
-                <a:latin typeface="Times New Roman" pitchFamily="18" charset="0"/>
-                <a:cs typeface="Times New Roman" pitchFamily="18" charset="0"/>
-              </a:rPr>
-              <a:t>КАК </a:t>
-            </a:r>
-            <a:r>
-              <a:rPr lang="ru-RU" dirty="0" err="1" smtClean="0">
-                <a:latin typeface="Times New Roman" pitchFamily="18" charset="0"/>
-                <a:cs typeface="Times New Roman" pitchFamily="18" charset="0"/>
-              </a:rPr>
-              <a:t>ПродажиТовары</a:t>
-            </a:r>
-            <a:r>
-              <a:rPr lang="ru-RU" dirty="0" smtClean="0">
-                <a:latin typeface="Times New Roman" pitchFamily="18" charset="0"/>
-                <a:cs typeface="Times New Roman" pitchFamily="18" charset="0"/>
-              </a:rPr>
-              <a:t> — псевдоним для табличной части, чтобы удобно обращаться к её полям;</a:t>
-            </a:r>
-          </a:p>
-          <a:p>
-            <a:pPr algn="just"/>
-            <a:r>
-              <a:rPr lang="ru-RU" dirty="0" smtClean="0">
-                <a:latin typeface="Times New Roman" pitchFamily="18" charset="0"/>
-                <a:cs typeface="Times New Roman" pitchFamily="18" charset="0"/>
-              </a:rPr>
-              <a:t>ЛЕВОЕ СОЕДИНЕНИЕ </a:t>
-            </a:r>
-            <a:r>
-              <a:rPr lang="ru-RU" dirty="0" err="1" smtClean="0">
-                <a:latin typeface="Times New Roman" pitchFamily="18" charset="0"/>
-                <a:cs typeface="Times New Roman" pitchFamily="18" charset="0"/>
-              </a:rPr>
-              <a:t>Документ.Продажа</a:t>
-            </a:r>
-            <a:r>
-              <a:rPr lang="ru-RU" dirty="0" smtClean="0">
-                <a:latin typeface="Times New Roman" pitchFamily="18" charset="0"/>
-                <a:cs typeface="Times New Roman" pitchFamily="18" charset="0"/>
-              </a:rPr>
-              <a:t> КАК Продажа — подключает сам документ «Продажа» (с датой, номером, признаком проведения и т. д.);</a:t>
-            </a:r>
-          </a:p>
-          <a:p>
-            <a:pPr algn="just"/>
-            <a:r>
-              <a:rPr lang="ru-RU" dirty="0" smtClean="0">
-                <a:latin typeface="Times New Roman" pitchFamily="18" charset="0"/>
-                <a:cs typeface="Times New Roman" pitchFamily="18" charset="0"/>
-              </a:rPr>
-              <a:t>ПО </a:t>
-            </a:r>
-            <a:r>
-              <a:rPr lang="ru-RU" dirty="0" err="1" smtClean="0">
-                <a:latin typeface="Times New Roman" pitchFamily="18" charset="0"/>
-                <a:cs typeface="Times New Roman" pitchFamily="18" charset="0"/>
-              </a:rPr>
-              <a:t>ПродажиТовары.Ссылка</a:t>
-            </a:r>
-            <a:r>
-              <a:rPr lang="ru-RU" dirty="0" smtClean="0">
-                <a:latin typeface="Times New Roman" pitchFamily="18" charset="0"/>
-                <a:cs typeface="Times New Roman" pitchFamily="18" charset="0"/>
-              </a:rPr>
-              <a:t> = </a:t>
-            </a:r>
-            <a:r>
-              <a:rPr lang="ru-RU" dirty="0" err="1" smtClean="0">
-                <a:latin typeface="Times New Roman" pitchFamily="18" charset="0"/>
-                <a:cs typeface="Times New Roman" pitchFamily="18" charset="0"/>
-              </a:rPr>
-              <a:t>Продажа.Ссылка</a:t>
-            </a:r>
-            <a:r>
-              <a:rPr lang="ru-RU" dirty="0" smtClean="0">
-                <a:latin typeface="Times New Roman" pitchFamily="18" charset="0"/>
-                <a:cs typeface="Times New Roman" pitchFamily="18" charset="0"/>
-              </a:rPr>
-              <a:t> — связывает табличную часть с документом по полю Ссылка (каждый элемент табличной части относится к конкретному документу).</a:t>
-            </a:r>
-            <a:endParaRPr lang="en-US" dirty="0" smtClean="0">
-              <a:latin typeface="Times New Roman" pitchFamily="18" charset="0"/>
-              <a:cs typeface="Times New Roman" pitchFamily="18" charset="0"/>
-            </a:endParaRPr>
-          </a:p>
-          <a:p>
-            <a:pPr algn="just"/>
+            <a:pPr algn="ctr"/>
             <a:r>
               <a:rPr lang="ru-RU" b="1" dirty="0" smtClean="0">
                 <a:latin typeface="Times New Roman" pitchFamily="18" charset="0"/>
                 <a:cs typeface="Times New Roman" pitchFamily="18" charset="0"/>
               </a:rPr>
-              <a:t>Зачем нужно соединение:</a:t>
-            </a:r>
-            <a:r>
-              <a:rPr lang="ru-RU" dirty="0" smtClean="0">
-                <a:latin typeface="Times New Roman" pitchFamily="18" charset="0"/>
-                <a:cs typeface="Times New Roman" pitchFamily="18" charset="0"/>
-              </a:rPr>
-              <a:t> чтобы получить доступ к дате документа (</a:t>
-            </a:r>
-            <a:r>
-              <a:rPr lang="ru-RU" dirty="0" err="1" smtClean="0">
-                <a:latin typeface="Times New Roman" pitchFamily="18" charset="0"/>
-                <a:cs typeface="Times New Roman" pitchFamily="18" charset="0"/>
-              </a:rPr>
-              <a:t>Продажа.Дата</a:t>
-            </a:r>
-            <a:r>
-              <a:rPr lang="ru-RU" dirty="0" smtClean="0">
-                <a:latin typeface="Times New Roman" pitchFamily="18" charset="0"/>
-                <a:cs typeface="Times New Roman" pitchFamily="18" charset="0"/>
-              </a:rPr>
-              <a:t>), которая хранится не в табличной части, а в шапке документа.</a:t>
-            </a:r>
-            <a:endParaRPr lang="ru-RU" dirty="0">
+              <a:t>Пункт 5</a:t>
+            </a:r>
+            <a:endParaRPr lang="en-US" b="1" dirty="0" smtClean="0">
               <a:latin typeface="Times New Roman" pitchFamily="18" charset="0"/>
               <a:cs typeface="Times New Roman" pitchFamily="18" charset="0"/>
             </a:endParaRPr>
@@ -4179,42 +4282,14 @@
       </p:grpSpPr>
       <p:sp>
         <p:nvSpPr>
-          <p:cNvPr id="2" name="Заголовок 1"/>
-          <p:cNvSpPr>
-            <a:spLocks noGrp="1"/>
-          </p:cNvSpPr>
-          <p:nvPr>
-            <p:ph type="title"/>
-          </p:nvPr>
+          <p:cNvPr id="2" name="Прямоугольник 1"/>
+          <p:cNvSpPr/>
+          <p:nvPr/>
         </p:nvSpPr>
         <p:spPr>
           <a:xfrm>
-            <a:off x="457200" y="-357214"/>
-            <a:ext cx="8229600" cy="1143000"/>
-          </a:xfrm>
-        </p:spPr>
-        <p:txBody>
-          <a:bodyPr/>
-          <a:lstStyle/>
-          <a:p>
-            <a:r>
-              <a:rPr lang="ru-RU" dirty="0" smtClean="0"/>
-              <a:t>Итог</a:t>
-            </a:r>
-            <a:endParaRPr lang="ru-RU" dirty="0"/>
-          </a:p>
-        </p:txBody>
-      </p:sp>
-      <p:sp>
-        <p:nvSpPr>
-          <p:cNvPr id="3" name="Прямоугольник 2"/>
-          <p:cNvSpPr/>
-          <p:nvPr/>
-        </p:nvSpPr>
-        <p:spPr>
-          <a:xfrm>
-            <a:off x="0" y="857232"/>
-            <a:ext cx="9144000" cy="4801314"/>
+            <a:off x="0" y="0"/>
+            <a:ext cx="9144000" cy="6340197"/>
           </a:xfrm>
           <a:prstGeom prst="rect">
             <a:avLst/>
@@ -4226,22 +4301,213 @@
           </a:bodyPr>
           <a:lstStyle/>
           <a:p>
+            <a:pPr algn="ctr"/>
+            <a:r>
+              <a:rPr lang="ru-RU" b="1" dirty="0" smtClean="0">
+                <a:latin typeface="Times New Roman" pitchFamily="18" charset="0"/>
+                <a:cs typeface="Times New Roman" pitchFamily="18" charset="0"/>
+              </a:rPr>
+              <a:t>В рамках этой задачи</a:t>
+            </a:r>
+            <a:endParaRPr lang="en-US" b="1" dirty="0" smtClean="0">
+              <a:latin typeface="Times New Roman" pitchFamily="18" charset="0"/>
+              <a:cs typeface="Times New Roman" pitchFamily="18" charset="0"/>
+            </a:endParaRPr>
+          </a:p>
+          <a:p>
+            <a:pPr algn="ctr"/>
+            <a:r>
+              <a:rPr lang="ru-RU" sz="1400" b="1" i="1" dirty="0" smtClean="0">
+                <a:latin typeface="Times New Roman" pitchFamily="18" charset="0"/>
+                <a:cs typeface="Times New Roman" pitchFamily="18" charset="0"/>
+              </a:rPr>
+              <a:t>1. Исключает ошибки ручного ввода</a:t>
+            </a:r>
+          </a:p>
+          <a:p>
             <a:pPr algn="just"/>
             <a:r>
-              <a:rPr lang="ru-RU" dirty="0" smtClean="0">
-                <a:latin typeface="Times New Roman" pitchFamily="18" charset="0"/>
-                <a:cs typeface="Times New Roman" pitchFamily="18" charset="0"/>
-              </a:rPr>
-              <a:t>Задача по учёту канцтоваров в 1С полезна, потому что даёт маленькому магазину готовый инструмент для чёткого контроля бизнеса. С помощью справочников «Номенклатура» и «Склады» формируется единый каталог товаров и мест хранения — это исключает путаницу с позициями и упрощает добавление новинок. Регистр накопления с остатками автоматически отслеживает, сколько ручек и карандашей есть на складе в любой момент: так не будет ситуаций, когда товар продали, а его нет в наличии, или заказали слишком много лишнего. Документы «Поступление» и «Продажа» фиксируют все операции, привязывают их к дате и складу, а данные из них автоматически попадают в регистр — не нужно считать вручную. Запросы на остатки помогают утром быстро понять, каких товаров мало и что нужно заказать, а запросы на обороты показывают, что и сколько продали за день или неделю — так можно анализировать спрос. Константа с названием магазина унифицирует отчёты (актуально, если магазинов несколько). А учёт цены в документе «Продажа» и отчёт по выручке позволяют видеть не только количество проданного, но и деньги: сверять кассу с данными системы, выявлять самые прибыльные позиции, считать прибыль и контролировать кассиров. В итоге магазин экономит время на учёте, снижает число ошибок, получает точные данные для решений (какие товары закупать, как менять цены), готов к расширению (новые товары, склады)</a:t>
-            </a:r>
-            <a:r>
-              <a:rPr lang="en-US" dirty="0" smtClean="0">
-                <a:latin typeface="Times New Roman" pitchFamily="18" charset="0"/>
-                <a:cs typeface="Times New Roman" pitchFamily="18" charset="0"/>
-              </a:rPr>
-              <a:t>.</a:t>
-            </a:r>
-            <a:endParaRPr lang="ru-RU" dirty="0">
+              <a:rPr lang="ru-RU" sz="1400" dirty="0" smtClean="0">
+                <a:latin typeface="Times New Roman" pitchFamily="18" charset="0"/>
+                <a:cs typeface="Times New Roman" pitchFamily="18" charset="0"/>
+              </a:rPr>
+              <a:t>Без документа пришлось бы открывать каждый товар из группы «Ноутбуки» в справочнике «Товары» и менять цену вручную. При сотне позиций это:</a:t>
+            </a:r>
+          </a:p>
+          <a:p>
+            <a:pPr algn="just"/>
+            <a:r>
+              <a:rPr lang="ru-RU" sz="1400" dirty="0" smtClean="0">
+                <a:latin typeface="Times New Roman" pitchFamily="18" charset="0"/>
+                <a:cs typeface="Times New Roman" pitchFamily="18" charset="0"/>
+              </a:rPr>
+              <a:t>долго; высок риск опечатки (ввести 5 000 вместо 50 000); легко пропустить </a:t>
+            </a:r>
+            <a:r>
+              <a:rPr lang="ru-RU" sz="1400" dirty="0" err="1" smtClean="0">
+                <a:latin typeface="Times New Roman" pitchFamily="18" charset="0"/>
+                <a:cs typeface="Times New Roman" pitchFamily="18" charset="0"/>
+              </a:rPr>
+              <a:t>какой‑то</a:t>
+            </a:r>
+            <a:r>
+              <a:rPr lang="ru-RU" sz="1400" dirty="0" smtClean="0">
+                <a:latin typeface="Times New Roman" pitchFamily="18" charset="0"/>
+                <a:cs typeface="Times New Roman" pitchFamily="18" charset="0"/>
+              </a:rPr>
+              <a:t> товар.</a:t>
+            </a:r>
+          </a:p>
+          <a:p>
+            <a:pPr algn="just"/>
+            <a:r>
+              <a:rPr lang="ru-RU" sz="1400" dirty="0" smtClean="0">
+                <a:latin typeface="Times New Roman" pitchFamily="18" charset="0"/>
+                <a:cs typeface="Times New Roman" pitchFamily="18" charset="0"/>
+              </a:rPr>
+              <a:t>Документ автоматически обрабатывает всю группу — ошибка практически исключена.</a:t>
+            </a:r>
+          </a:p>
+          <a:p>
+            <a:pPr algn="ctr"/>
+            <a:r>
+              <a:rPr lang="ru-RU" sz="1400" b="1" i="1" dirty="0" smtClean="0">
+                <a:latin typeface="Times New Roman" pitchFamily="18" charset="0"/>
+                <a:cs typeface="Times New Roman" pitchFamily="18" charset="0"/>
+              </a:rPr>
+              <a:t>2. Фиксирует решение руководства</a:t>
+            </a:r>
+          </a:p>
+          <a:p>
+            <a:pPr algn="just"/>
+            <a:r>
+              <a:rPr lang="ru-RU" sz="1400" dirty="0" smtClean="0">
+                <a:latin typeface="Times New Roman" pitchFamily="18" charset="0"/>
+                <a:cs typeface="Times New Roman" pitchFamily="18" charset="0"/>
+              </a:rPr>
+              <a:t>Документ — это официальный след: кто создал документ (ответственный); когда (дата и время создания); почему (поле «Причина»: «Подорожание оперативной памяти»); на сколько и на какие товары (таблица с товарами и ценами). Без него доказать, что цены подняли осознанно (а не случайно), будет сложно.</a:t>
+            </a:r>
+          </a:p>
+          <a:p>
+            <a:pPr algn="ctr"/>
+            <a:r>
+              <a:rPr lang="ru-RU" sz="1400" b="1" i="1" dirty="0" smtClean="0">
+                <a:latin typeface="Times New Roman" pitchFamily="18" charset="0"/>
+                <a:cs typeface="Times New Roman" pitchFamily="18" charset="0"/>
+              </a:rPr>
+              <a:t>3. Сохраняет историю изменений</a:t>
+            </a:r>
+          </a:p>
+          <a:p>
+            <a:pPr algn="just"/>
+            <a:r>
+              <a:rPr lang="ru-RU" sz="1400" dirty="0" smtClean="0">
+                <a:latin typeface="Times New Roman" pitchFamily="18" charset="0"/>
+                <a:cs typeface="Times New Roman" pitchFamily="18" charset="0"/>
+              </a:rPr>
+              <a:t>Документ создаёт «версию» цен: до проведения — видны старые цены; после проведения — новые; можно сравнить, на сколько выросла цена по каждому товару; в карточке товара можно посмотреть, когда и каким документом менялась цена.</a:t>
+            </a:r>
+          </a:p>
+          <a:p>
+            <a:pPr algn="just"/>
+            <a:r>
+              <a:rPr lang="ru-RU" sz="1400" dirty="0" smtClean="0">
+                <a:latin typeface="Times New Roman" pitchFamily="18" charset="0"/>
+                <a:cs typeface="Times New Roman" pitchFamily="18" charset="0"/>
+              </a:rPr>
+              <a:t>Без документа история теряется — через месяц никто не вспомнит, почему цена выросла.</a:t>
+            </a:r>
+          </a:p>
+          <a:p>
+            <a:pPr algn="ctr"/>
+            <a:r>
+              <a:rPr lang="ru-RU" sz="1400" b="1" i="1" dirty="0" smtClean="0">
+                <a:latin typeface="Times New Roman" pitchFamily="18" charset="0"/>
+                <a:cs typeface="Times New Roman" pitchFamily="18" charset="0"/>
+              </a:rPr>
+              <a:t>4. Автоматизирует обновление данных</a:t>
+            </a:r>
+          </a:p>
+          <a:p>
+            <a:pPr algn="just"/>
+            <a:r>
+              <a:rPr lang="ru-RU" sz="1400" dirty="0" smtClean="0">
+                <a:latin typeface="Times New Roman" pitchFamily="18" charset="0"/>
+                <a:cs typeface="Times New Roman" pitchFamily="18" charset="0"/>
+              </a:rPr>
+              <a:t>При проведении документа система: сама находит все ноутбуки в справочнике; сама пересчитывает цену (+50 %); сама записывает новое значение в поле «Цена»; сама ставит дату изменения.</a:t>
+            </a:r>
+          </a:p>
+          <a:p>
+            <a:pPr algn="just"/>
+            <a:r>
+              <a:rPr lang="ru-RU" sz="1400" dirty="0" smtClean="0">
+                <a:latin typeface="Times New Roman" pitchFamily="18" charset="0"/>
+                <a:cs typeface="Times New Roman" pitchFamily="18" charset="0"/>
+              </a:rPr>
+              <a:t>Без документа всё это нужно делать вручную — час работы вместо минуты.</a:t>
+            </a:r>
+          </a:p>
+          <a:p>
+            <a:pPr algn="ctr"/>
+            <a:r>
+              <a:rPr lang="ru-RU" sz="1400" b="1" i="1" dirty="0" smtClean="0">
+                <a:latin typeface="Times New Roman" pitchFamily="18" charset="0"/>
+                <a:cs typeface="Times New Roman" pitchFamily="18" charset="0"/>
+              </a:rPr>
+              <a:t>5. Даёт основу для отчётности и контроля</a:t>
+            </a:r>
+          </a:p>
+          <a:p>
+            <a:pPr algn="just"/>
+            <a:r>
+              <a:rPr lang="ru-RU" sz="1400" dirty="0" smtClean="0">
+                <a:latin typeface="Times New Roman" pitchFamily="18" charset="0"/>
+                <a:cs typeface="Times New Roman" pitchFamily="18" charset="0"/>
+              </a:rPr>
+              <a:t>На основе документа можно: распечатать приказ об изменении цен для руководства; сформировать отчёт «История изменения цен» по группе товаров;</a:t>
+            </a:r>
+          </a:p>
+          <a:p>
+            <a:pPr algn="just"/>
+            <a:r>
+              <a:rPr lang="ru-RU" sz="1400" dirty="0" smtClean="0">
+                <a:latin typeface="Times New Roman" pitchFamily="18" charset="0"/>
+                <a:cs typeface="Times New Roman" pitchFamily="18" charset="0"/>
+              </a:rPr>
+              <a:t>проверить, все ли ноутбуки получили новую цену; сверить дату изменения с датой подорожания оперативной памяти у поставщика.</a:t>
+            </a:r>
+          </a:p>
+          <a:p>
+            <a:pPr algn="just"/>
+            <a:r>
+              <a:rPr lang="ru-RU" sz="1400" dirty="0" smtClean="0">
+                <a:latin typeface="Times New Roman" pitchFamily="18" charset="0"/>
+                <a:cs typeface="Times New Roman" pitchFamily="18" charset="0"/>
+              </a:rPr>
+              <a:t>Без документа подтвердить факт и параметры изменения невозможно.</a:t>
+            </a:r>
+          </a:p>
+          <a:p>
+            <a:pPr algn="ctr"/>
+            <a:r>
+              <a:rPr lang="ru-RU" sz="1400" b="1" i="1" dirty="0" smtClean="0">
+                <a:latin typeface="Times New Roman" pitchFamily="18" charset="0"/>
+                <a:cs typeface="Times New Roman" pitchFamily="18" charset="0"/>
+              </a:rPr>
+              <a:t>6. Обеспечивает прозрачность и аудит</a:t>
+            </a:r>
+          </a:p>
+          <a:p>
+            <a:pPr algn="just"/>
+            <a:r>
+              <a:rPr lang="ru-RU" sz="1400" dirty="0" smtClean="0">
+                <a:latin typeface="Times New Roman" pitchFamily="18" charset="0"/>
+                <a:cs typeface="Times New Roman" pitchFamily="18" charset="0"/>
+              </a:rPr>
+              <a:t>Если придёт проверка или возникнет спор с клиентом («У вас вчера была другая цена!»), документ покажет: когда именно изменилась цена; какой был официальный приказ (причина); какая цена была до и после. Без документа компания не сможет подтвердить законность новой цены.</a:t>
+            </a:r>
+            <a:endParaRPr lang="ru-RU" sz="1400" dirty="0">
               <a:latin typeface="Times New Roman" pitchFamily="18" charset="0"/>
               <a:cs typeface="Times New Roman" pitchFamily="18" charset="0"/>
             </a:endParaRPr>
